--- a/docs/collateral/seminar-luggage/out/BondEx_Seminar_Draft.pptx
+++ b/docs/collateral/seminar-luggage/out/BondEx_Seminar_Draft.pptx
@@ -863,7 +863,7 @@
           <a:lstStyle/>
           <a:p>
             <a:r>
-              <a:t>［2分］チェックアウトが荷物を手放す自然な接点であることを示し、BondExの現在の取り組みを30秒で紹介する。</a:t>
+              <a:t>［2分］チェックアウトが荷物を手放す自然な接点であることを示し、図を使ってBondExの役割（既存の物流を旅の動線につなぐ）を30秒で紹介する。</a:t>
             </a:r>
           </a:p>
           <a:p/>
@@ -889,7 +889,12 @@
           </a:p>
           <a:p>
             <a:r>
-              <a:t>私たちBondExは、まさにここから始めています。ホテルからホテルへの、スーツケース配送です。旅行会社やDMCの皆さんからご依頼をいただいて、既存の物流ネットワークを使って配送を手配しています。新しく配送網を作っているのではなく、今ある物流を、旅の動線に合わせてつないでいる。それが私たちの役割です。</a:t>
+              <a:t>私たちBondExは、まさにここから始めています。ホテルからホテルへの、スーツケース配送です。</a:t>
+            </a:r>
+          </a:p>
+          <a:p>
+            <a:r>
+              <a:t>（図の左の点を指して）チェックアウトのときに、ホテルで荷物を預ける。人は上の点線のように、身軽に観光へ。荷物は下のオレンジの線、今ある物流で、次のホテルへ先回りします。（右の点を指して）夕方、次のホテルに着くと、荷物はもう届いている。旅行会社やDMCの皆さんからご依頼をいただいて、既存の物流ネットワークを使って配送を手配しています。新しく配送網を作っているのではなく、今ある物流を、旅の動線に合わせてつないでいる。それが私たちの役割です。</a:t>
             </a:r>
           </a:p>
           <a:p>
@@ -4920,70 +4925,582 @@
         <p:nvPr/>
       </p:nvGrpSpPr>
       <p:grpSpPr/>
-      <p:pic>
-        <p:nvPicPr>
-          <p:cNvPr id="2" name="写真（右クリック→図の変更で差し替え）" descr="s04.png"/>
-          <p:cNvPicPr>
-            <a:picLocks noChangeAspect="1"/>
-          </p:cNvPicPr>
+      <p:sp>
+        <p:nvSpPr>
+          <p:cNvPr id="2" name="図・線1"/>
+          <p:cNvSpPr/>
           <p:nvPr/>
-        </p:nvPicPr>
-        <p:blipFill>
-          <a:blip r:embed="rId2"/>
-          <a:srcRect/>
-          <a:stretch>
-            <a:fillRect/>
-          </a:stretch>
-        </p:blipFill>
+        </p:nvSpPr>
         <p:spPr>
           <a:xfrm>
-            <a:off x="0" y="0"/>
-            <a:ext cx="12192000" cy="6858000"/>
+            <a:off x="2540000" y="4381500"/>
+            <a:ext cx="1016000" cy="0"/>
           </a:xfrm>
-          <a:prstGeom prst="rect">
+          <a:custGeom>
+            <a:avLst/>
+            <a:gdLst/>
+            <a:ahLst/>
+            <a:cxnLst/>
+            <a:rect l="l" t="t" r="r" b="b"/>
+            <a:pathLst>
+              <a:path w="1016000" h="0">
+                <a:moveTo>
+                  <a:pt x="0" y="0"/>
+                </a:moveTo>
+                <a:lnTo>
+                  <a:pt x="1016000" y="0"/>
+                </a:lnTo>
+              </a:path>
+            </a:pathLst>
+          </a:custGeom>
+          <a:noFill/>
+          <a:ln w="38100" cap="rnd">
+            <a:solidFill>
+              <a:srgbClr val="FFFFFF"/>
+            </a:solidFill>
+            <a:round/>
+          </a:ln>
+        </p:spPr>
+        <p:txBody>
+          <a:bodyPr rtlCol="0" anchor="ctr"/>
+          <a:lstStyle/>
+          <a:p>
+            <a:pPr algn="ctr"/>
+          </a:p>
+        </p:txBody>
+      </p:sp>
+      <p:sp>
+        <p:nvSpPr>
+          <p:cNvPr id="3" name="図・線2"/>
+          <p:cNvSpPr/>
+          <p:nvPr/>
+        </p:nvSpPr>
+        <p:spPr>
+          <a:xfrm>
+            <a:off x="3556000" y="3587750"/>
+            <a:ext cx="5080000" cy="793750"/>
+          </a:xfrm>
+          <a:custGeom>
+            <a:avLst/>
+            <a:gdLst/>
+            <a:ahLst/>
+            <a:cxnLst/>
+            <a:rect l="l" t="t" r="r" b="b"/>
+            <a:pathLst>
+              <a:path w="5080000" h="793750">
+                <a:moveTo>
+                  <a:pt x="0" y="793750"/>
+                </a:moveTo>
+                <a:lnTo>
+                  <a:pt x="79375" y="744916"/>
+                </a:lnTo>
+                <a:lnTo>
+                  <a:pt x="158750" y="697632"/>
+                </a:lnTo>
+                <a:lnTo>
+                  <a:pt x="238125" y="651898"/>
+                </a:lnTo>
+                <a:lnTo>
+                  <a:pt x="317500" y="607715"/>
+                </a:lnTo>
+                <a:lnTo>
+                  <a:pt x="396875" y="565082"/>
+                </a:lnTo>
+                <a:lnTo>
+                  <a:pt x="476250" y="523999"/>
+                </a:lnTo>
+                <a:lnTo>
+                  <a:pt x="555625" y="484467"/>
+                </a:lnTo>
+                <a:lnTo>
+                  <a:pt x="635000" y="446484"/>
+                </a:lnTo>
+                <a:lnTo>
+                  <a:pt x="714375" y="410052"/>
+                </a:lnTo>
+                <a:lnTo>
+                  <a:pt x="793750" y="375171"/>
+                </a:lnTo>
+                <a:lnTo>
+                  <a:pt x="873125" y="341840"/>
+                </a:lnTo>
+                <a:lnTo>
+                  <a:pt x="952500" y="310059"/>
+                </a:lnTo>
+                <a:lnTo>
+                  <a:pt x="1031875" y="279828"/>
+                </a:lnTo>
+                <a:lnTo>
+                  <a:pt x="1111250" y="251147"/>
+                </a:lnTo>
+                <a:lnTo>
+                  <a:pt x="1190625" y="224017"/>
+                </a:lnTo>
+                <a:lnTo>
+                  <a:pt x="1270000" y="198438"/>
+                </a:lnTo>
+                <a:lnTo>
+                  <a:pt x="1349375" y="174408"/>
+                </a:lnTo>
+                <a:lnTo>
+                  <a:pt x="1428750" y="151929"/>
+                </a:lnTo>
+                <a:lnTo>
+                  <a:pt x="1508125" y="131000"/>
+                </a:lnTo>
+                <a:lnTo>
+                  <a:pt x="1587500" y="111621"/>
+                </a:lnTo>
+                <a:lnTo>
+                  <a:pt x="1666875" y="93793"/>
+                </a:lnTo>
+                <a:lnTo>
+                  <a:pt x="1746250" y="77515"/>
+                </a:lnTo>
+                <a:lnTo>
+                  <a:pt x="1825625" y="62787"/>
+                </a:lnTo>
+                <a:lnTo>
+                  <a:pt x="1905000" y="49609"/>
+                </a:lnTo>
+                <a:lnTo>
+                  <a:pt x="1984375" y="37982"/>
+                </a:lnTo>
+                <a:lnTo>
+                  <a:pt x="2063750" y="27905"/>
+                </a:lnTo>
+                <a:lnTo>
+                  <a:pt x="2143125" y="19379"/>
+                </a:lnTo>
+                <a:lnTo>
+                  <a:pt x="2222500" y="12402"/>
+                </a:lnTo>
+                <a:lnTo>
+                  <a:pt x="2301875" y="6976"/>
+                </a:lnTo>
+                <a:lnTo>
+                  <a:pt x="2381250" y="3101"/>
+                </a:lnTo>
+                <a:lnTo>
+                  <a:pt x="2460625" y="775"/>
+                </a:lnTo>
+                <a:lnTo>
+                  <a:pt x="2540000" y="0"/>
+                </a:lnTo>
+                <a:lnTo>
+                  <a:pt x="2619375" y="775"/>
+                </a:lnTo>
+                <a:lnTo>
+                  <a:pt x="2698750" y="3101"/>
+                </a:lnTo>
+                <a:lnTo>
+                  <a:pt x="2778125" y="6976"/>
+                </a:lnTo>
+                <a:lnTo>
+                  <a:pt x="2857500" y="12402"/>
+                </a:lnTo>
+                <a:lnTo>
+                  <a:pt x="2936875" y="19379"/>
+                </a:lnTo>
+                <a:lnTo>
+                  <a:pt x="3016250" y="27905"/>
+                </a:lnTo>
+                <a:lnTo>
+                  <a:pt x="3095625" y="37982"/>
+                </a:lnTo>
+                <a:lnTo>
+                  <a:pt x="3175000" y="49609"/>
+                </a:lnTo>
+                <a:lnTo>
+                  <a:pt x="3254375" y="62787"/>
+                </a:lnTo>
+                <a:lnTo>
+                  <a:pt x="3333750" y="77515"/>
+                </a:lnTo>
+                <a:lnTo>
+                  <a:pt x="3413125" y="93793"/>
+                </a:lnTo>
+                <a:lnTo>
+                  <a:pt x="3492500" y="111621"/>
+                </a:lnTo>
+                <a:lnTo>
+                  <a:pt x="3571875" y="131000"/>
+                </a:lnTo>
+                <a:lnTo>
+                  <a:pt x="3651250" y="151929"/>
+                </a:lnTo>
+                <a:lnTo>
+                  <a:pt x="3730625" y="174408"/>
+                </a:lnTo>
+                <a:lnTo>
+                  <a:pt x="3810000" y="198438"/>
+                </a:lnTo>
+                <a:lnTo>
+                  <a:pt x="3889375" y="224017"/>
+                </a:lnTo>
+                <a:lnTo>
+                  <a:pt x="3968750" y="251147"/>
+                </a:lnTo>
+                <a:lnTo>
+                  <a:pt x="4048125" y="279828"/>
+                </a:lnTo>
+                <a:lnTo>
+                  <a:pt x="4127500" y="310059"/>
+                </a:lnTo>
+                <a:lnTo>
+                  <a:pt x="4206875" y="341840"/>
+                </a:lnTo>
+                <a:lnTo>
+                  <a:pt x="4286250" y="375171"/>
+                </a:lnTo>
+                <a:lnTo>
+                  <a:pt x="4365625" y="410052"/>
+                </a:lnTo>
+                <a:lnTo>
+                  <a:pt x="4445000" y="446484"/>
+                </a:lnTo>
+                <a:lnTo>
+                  <a:pt x="4524375" y="484467"/>
+                </a:lnTo>
+                <a:lnTo>
+                  <a:pt x="4603750" y="523999"/>
+                </a:lnTo>
+                <a:lnTo>
+                  <a:pt x="4683125" y="565082"/>
+                </a:lnTo>
+                <a:lnTo>
+                  <a:pt x="4762500" y="607715"/>
+                </a:lnTo>
+                <a:lnTo>
+                  <a:pt x="4841875" y="651898"/>
+                </a:lnTo>
+                <a:lnTo>
+                  <a:pt x="4921250" y="697632"/>
+                </a:lnTo>
+                <a:lnTo>
+                  <a:pt x="5000625" y="744916"/>
+                </a:lnTo>
+                <a:lnTo>
+                  <a:pt x="5080000" y="793750"/>
+                </a:lnTo>
+              </a:path>
+            </a:pathLst>
+          </a:custGeom>
+          <a:noFill/>
+          <a:ln w="31750" cap="rnd">
+            <a:solidFill>
+              <a:srgbClr val="FFFFFF">
+                <a:alpha val="85000"/>
+              </a:srgbClr>
+            </a:solidFill>
+            <a:custDash>
+              <a:ds d="20000" sp="320000"/>
+            </a:custDash>
+            <a:round/>
+          </a:ln>
+        </p:spPr>
+        <p:txBody>
+          <a:bodyPr rtlCol="0" anchor="ctr"/>
+          <a:lstStyle/>
+          <a:p>
+            <a:pPr algn="ctr"/>
+          </a:p>
+        </p:txBody>
+      </p:sp>
+      <p:sp>
+        <p:nvSpPr>
+          <p:cNvPr id="4" name="図・線3"/>
+          <p:cNvSpPr/>
+          <p:nvPr/>
+        </p:nvSpPr>
+        <p:spPr>
+          <a:xfrm>
+            <a:off x="3556000" y="4381500"/>
+            <a:ext cx="5080000" cy="793750"/>
+          </a:xfrm>
+          <a:custGeom>
+            <a:avLst/>
+            <a:gdLst/>
+            <a:ahLst/>
+            <a:cxnLst/>
+            <a:rect l="l" t="t" r="r" b="b"/>
+            <a:pathLst>
+              <a:path w="5080000" h="793750">
+                <a:moveTo>
+                  <a:pt x="0" y="0"/>
+                </a:moveTo>
+                <a:lnTo>
+                  <a:pt x="79375" y="48834"/>
+                </a:lnTo>
+                <a:lnTo>
+                  <a:pt x="158750" y="96118"/>
+                </a:lnTo>
+                <a:lnTo>
+                  <a:pt x="238125" y="141852"/>
+                </a:lnTo>
+                <a:lnTo>
+                  <a:pt x="317500" y="186035"/>
+                </a:lnTo>
+                <a:lnTo>
+                  <a:pt x="396875" y="228668"/>
+                </a:lnTo>
+                <a:lnTo>
+                  <a:pt x="476250" y="269751"/>
+                </a:lnTo>
+                <a:lnTo>
+                  <a:pt x="555625" y="309283"/>
+                </a:lnTo>
+                <a:lnTo>
+                  <a:pt x="635000" y="347266"/>
+                </a:lnTo>
+                <a:lnTo>
+                  <a:pt x="714375" y="383698"/>
+                </a:lnTo>
+                <a:lnTo>
+                  <a:pt x="793750" y="418579"/>
+                </a:lnTo>
+                <a:lnTo>
+                  <a:pt x="873125" y="451910"/>
+                </a:lnTo>
+                <a:lnTo>
+                  <a:pt x="952500" y="483691"/>
+                </a:lnTo>
+                <a:lnTo>
+                  <a:pt x="1031875" y="513922"/>
+                </a:lnTo>
+                <a:lnTo>
+                  <a:pt x="1111250" y="542603"/>
+                </a:lnTo>
+                <a:lnTo>
+                  <a:pt x="1190625" y="569733"/>
+                </a:lnTo>
+                <a:lnTo>
+                  <a:pt x="1270000" y="595312"/>
+                </a:lnTo>
+                <a:lnTo>
+                  <a:pt x="1349375" y="619342"/>
+                </a:lnTo>
+                <a:lnTo>
+                  <a:pt x="1428750" y="641821"/>
+                </a:lnTo>
+                <a:lnTo>
+                  <a:pt x="1508125" y="662750"/>
+                </a:lnTo>
+                <a:lnTo>
+                  <a:pt x="1587500" y="682129"/>
+                </a:lnTo>
+                <a:lnTo>
+                  <a:pt x="1666875" y="699957"/>
+                </a:lnTo>
+                <a:lnTo>
+                  <a:pt x="1746250" y="716235"/>
+                </a:lnTo>
+                <a:lnTo>
+                  <a:pt x="1825625" y="730963"/>
+                </a:lnTo>
+                <a:lnTo>
+                  <a:pt x="1905000" y="744141"/>
+                </a:lnTo>
+                <a:lnTo>
+                  <a:pt x="1984375" y="755768"/>
+                </a:lnTo>
+                <a:lnTo>
+                  <a:pt x="2063750" y="765845"/>
+                </a:lnTo>
+                <a:lnTo>
+                  <a:pt x="2143125" y="774371"/>
+                </a:lnTo>
+                <a:lnTo>
+                  <a:pt x="2222500" y="781348"/>
+                </a:lnTo>
+                <a:lnTo>
+                  <a:pt x="2301875" y="786774"/>
+                </a:lnTo>
+                <a:lnTo>
+                  <a:pt x="2381250" y="790649"/>
+                </a:lnTo>
+                <a:lnTo>
+                  <a:pt x="2460625" y="792975"/>
+                </a:lnTo>
+                <a:lnTo>
+                  <a:pt x="2540000" y="793750"/>
+                </a:lnTo>
+                <a:lnTo>
+                  <a:pt x="2619375" y="792975"/>
+                </a:lnTo>
+                <a:lnTo>
+                  <a:pt x="2698750" y="790649"/>
+                </a:lnTo>
+                <a:lnTo>
+                  <a:pt x="2778125" y="786774"/>
+                </a:lnTo>
+                <a:lnTo>
+                  <a:pt x="2857500" y="781348"/>
+                </a:lnTo>
+                <a:lnTo>
+                  <a:pt x="2936875" y="774371"/>
+                </a:lnTo>
+                <a:lnTo>
+                  <a:pt x="3016250" y="765845"/>
+                </a:lnTo>
+                <a:lnTo>
+                  <a:pt x="3095625" y="755768"/>
+                </a:lnTo>
+                <a:lnTo>
+                  <a:pt x="3175000" y="744141"/>
+                </a:lnTo>
+                <a:lnTo>
+                  <a:pt x="3254375" y="730963"/>
+                </a:lnTo>
+                <a:lnTo>
+                  <a:pt x="3333750" y="716235"/>
+                </a:lnTo>
+                <a:lnTo>
+                  <a:pt x="3413125" y="699957"/>
+                </a:lnTo>
+                <a:lnTo>
+                  <a:pt x="3492500" y="682129"/>
+                </a:lnTo>
+                <a:lnTo>
+                  <a:pt x="3571875" y="662750"/>
+                </a:lnTo>
+                <a:lnTo>
+                  <a:pt x="3651250" y="641821"/>
+                </a:lnTo>
+                <a:lnTo>
+                  <a:pt x="3730625" y="619342"/>
+                </a:lnTo>
+                <a:lnTo>
+                  <a:pt x="3810000" y="595312"/>
+                </a:lnTo>
+                <a:lnTo>
+                  <a:pt x="3889375" y="569733"/>
+                </a:lnTo>
+                <a:lnTo>
+                  <a:pt x="3968750" y="542603"/>
+                </a:lnTo>
+                <a:lnTo>
+                  <a:pt x="4048125" y="513922"/>
+                </a:lnTo>
+                <a:lnTo>
+                  <a:pt x="4127500" y="483691"/>
+                </a:lnTo>
+                <a:lnTo>
+                  <a:pt x="4206875" y="451910"/>
+                </a:lnTo>
+                <a:lnTo>
+                  <a:pt x="4286250" y="418579"/>
+                </a:lnTo>
+                <a:lnTo>
+                  <a:pt x="4365625" y="383698"/>
+                </a:lnTo>
+                <a:lnTo>
+                  <a:pt x="4445000" y="347266"/>
+                </a:lnTo>
+                <a:lnTo>
+                  <a:pt x="4524375" y="309283"/>
+                </a:lnTo>
+                <a:lnTo>
+                  <a:pt x="4603750" y="269751"/>
+                </a:lnTo>
+                <a:lnTo>
+                  <a:pt x="4683125" y="228668"/>
+                </a:lnTo>
+                <a:lnTo>
+                  <a:pt x="4762500" y="186035"/>
+                </a:lnTo>
+                <a:lnTo>
+                  <a:pt x="4841875" y="141852"/>
+                </a:lnTo>
+                <a:lnTo>
+                  <a:pt x="4921250" y="96118"/>
+                </a:lnTo>
+                <a:lnTo>
+                  <a:pt x="5000625" y="48834"/>
+                </a:lnTo>
+                <a:lnTo>
+                  <a:pt x="5080000" y="0"/>
+                </a:lnTo>
+              </a:path>
+            </a:pathLst>
+          </a:custGeom>
+          <a:noFill/>
+          <a:ln w="50800" cap="rnd">
+            <a:solidFill>
+              <a:srgbClr val="F26A1B"/>
+            </a:solidFill>
+            <a:round/>
+          </a:ln>
+        </p:spPr>
+        <p:txBody>
+          <a:bodyPr rtlCol="0" anchor="ctr"/>
+          <a:lstStyle/>
+          <a:p>
+            <a:pPr algn="ctr"/>
+          </a:p>
+        </p:txBody>
+      </p:sp>
+      <p:sp>
+        <p:nvSpPr>
+          <p:cNvPr id="5" name="図・線4"/>
+          <p:cNvSpPr/>
+          <p:nvPr/>
+        </p:nvSpPr>
+        <p:spPr>
+          <a:xfrm>
+            <a:off x="8636000" y="4381500"/>
+            <a:ext cx="1016000" cy="0"/>
+          </a:xfrm>
+          <a:custGeom>
+            <a:avLst/>
+            <a:gdLst/>
+            <a:ahLst/>
+            <a:cxnLst/>
+            <a:rect l="l" t="t" r="r" b="b"/>
+            <a:pathLst>
+              <a:path w="1016000" h="0">
+                <a:moveTo>
+                  <a:pt x="0" y="0"/>
+                </a:moveTo>
+                <a:lnTo>
+                  <a:pt x="1016000" y="0"/>
+                </a:lnTo>
+              </a:path>
+            </a:pathLst>
+          </a:custGeom>
+          <a:noFill/>
+          <a:ln w="38100" cap="rnd">
+            <a:solidFill>
+              <a:srgbClr val="FFFFFF"/>
+            </a:solidFill>
+            <a:round/>
+          </a:ln>
+        </p:spPr>
+        <p:txBody>
+          <a:bodyPr rtlCol="0" anchor="ctr"/>
+          <a:lstStyle/>
+          <a:p>
+            <a:pPr algn="ctr"/>
+          </a:p>
+        </p:txBody>
+      </p:sp>
+      <p:sp>
+        <p:nvSpPr>
+          <p:cNvPr id="6" name="図・点"/>
+          <p:cNvSpPr/>
+          <p:nvPr/>
+        </p:nvSpPr>
+        <p:spPr>
+          <a:xfrm>
+            <a:off x="2432050" y="4273550"/>
+            <a:ext cx="215900" cy="215900"/>
+          </a:xfrm>
+          <a:prstGeom prst="ellipse">
             <a:avLst/>
           </a:prstGeom>
-        </p:spPr>
-      </p:pic>
-      <p:sp>
-        <p:nvSpPr>
-          <p:cNvPr id="3" name="Scrim（写真の上の黒グラデーション）"/>
-          <p:cNvSpPr/>
-          <p:nvPr/>
-        </p:nvSpPr>
-        <p:spPr>
-          <a:xfrm>
-            <a:off x="0" y="0"/>
-            <a:ext cx="12192000" cy="6858000"/>
-          </a:xfrm>
-          <a:prstGeom prst="rect">
-            <a:avLst/>
-          </a:prstGeom>
-          <a:gradFill rotWithShape="1">
-            <a:gsLst>
-              <a:gs pos="0">
-                <a:srgbClr val="000000">
-                  <a:alpha val="0"/>
-                </a:srgbClr>
-              </a:gs>
-              <a:gs pos="36000">
-                <a:srgbClr val="000000">
-                  <a:alpha val="0"/>
-                </a:srgbClr>
-              </a:gs>
-              <a:gs pos="60000">
-                <a:srgbClr val="000000">
-                  <a:alpha val="42000"/>
-                </a:srgbClr>
-              </a:gs>
-              <a:gs pos="100000">
-                <a:srgbClr val="000000">
-                  <a:alpha val="84000"/>
-                </a:srgbClr>
-              </a:gs>
-            </a:gsLst>
-            <a:lin ang="5400000" scaled="0"/>
-          </a:gradFill>
+          <a:solidFill>
+            <a:srgbClr val="FFFFFF"/>
+          </a:solidFill>
           <a:ln>
             <a:noFill/>
           </a:ln>
@@ -4998,14 +5515,43 @@
       </p:sp>
       <p:sp>
         <p:nvSpPr>
-          <p:cNvPr id="4" name="見出し"/>
+          <p:cNvPr id="7" name="図・点"/>
+          <p:cNvSpPr/>
+          <p:nvPr/>
+        </p:nvSpPr>
+        <p:spPr>
+          <a:xfrm>
+            <a:off x="9544050" y="4273550"/>
+            <a:ext cx="215900" cy="215900"/>
+          </a:xfrm>
+          <a:prstGeom prst="ellipse">
+            <a:avLst/>
+          </a:prstGeom>
+          <a:solidFill>
+            <a:srgbClr val="FFFFFF"/>
+          </a:solidFill>
+          <a:ln>
+            <a:noFill/>
+          </a:ln>
+        </p:spPr>
+        <p:txBody>
+          <a:bodyPr rtlCol="0" anchor="ctr"/>
+          <a:lstStyle/>
+          <a:p>
+            <a:pPr algn="ctr"/>
+          </a:p>
+        </p:txBody>
+      </p:sp>
+      <p:sp>
+        <p:nvSpPr>
+          <p:cNvPr id="8" name="図・ラベル"/>
           <p:cNvSpPr txBox="1"/>
           <p:nvPr/>
         </p:nvSpPr>
         <p:spPr>
           <a:xfrm>
-            <a:off x="812800" y="4270375"/>
-            <a:ext cx="7112000" cy="1803400"/>
+            <a:off x="-3175000" y="3634740"/>
+            <a:ext cx="11430000" cy="432816"/>
           </a:xfrm>
           <a:prstGeom prst="rect">
             <a:avLst/>
@@ -5016,9 +5562,9 @@
           <a:bodyPr wrap="none" lIns="0" rIns="0" tIns="0" bIns="0" anchor="t"/>
           <a:lstStyle/>
           <a:p>
-            <a:pPr algn="l">
+            <a:pPr algn="ctr">
               <a:lnSpc>
-                <a:spcPts val="7100"/>
+                <a:spcPts val="3408"/>
               </a:lnSpc>
               <a:spcBef>
                 <a:spcPts val="0"/>
@@ -5028,7 +5574,322 @@
               </a:spcAft>
             </a:pPr>
             <a:r>
-              <a:rPr sz="5000" b="0" spc="-50" lang="ja-JP" altLang="en-US">
+              <a:rPr sz="2400" b="0" spc="-24" lang="ja-JP" altLang="en-US">
+                <a:solidFill>
+                  <a:srgbClr val="FFFFFF"/>
+                </a:solidFill>
+                <a:latin typeface="Noto Sans JP Medium"/>
+                <a:ea typeface="Noto Sans JP Medium"/>
+                <a:cs typeface="Noto Sans JP Medium"/>
+              </a:rPr>
+              <a:t>ホテル</a:t>
+            </a:r>
+          </a:p>
+        </p:txBody>
+      </p:sp>
+      <p:sp>
+        <p:nvSpPr>
+          <p:cNvPr id="9" name="図・ラベル"/>
+          <p:cNvSpPr txBox="1"/>
+          <p:nvPr/>
+        </p:nvSpPr>
+        <p:spPr>
+          <a:xfrm>
+            <a:off x="-3175000" y="4583112"/>
+            <a:ext cx="11430000" cy="270510"/>
+          </a:xfrm>
+          <a:prstGeom prst="rect">
+            <a:avLst/>
+          </a:prstGeom>
+          <a:noFill/>
+        </p:spPr>
+        <p:txBody>
+          <a:bodyPr wrap="none" lIns="0" rIns="0" tIns="0" bIns="0" anchor="t"/>
+          <a:lstStyle/>
+          <a:p>
+            <a:pPr algn="ctr">
+              <a:lnSpc>
+                <a:spcPts val="2129"/>
+              </a:lnSpc>
+              <a:spcBef>
+                <a:spcPts val="0"/>
+              </a:spcBef>
+              <a:spcAft>
+                <a:spcPts val="0"/>
+              </a:spcAft>
+            </a:pPr>
+            <a:r>
+              <a:rPr sz="1500" b="0" spc="-15" lang="ja-JP" altLang="en-US">
+                <a:solidFill>
+                  <a:srgbClr val="A3A3A3"/>
+                </a:solidFill>
+                <a:latin typeface="Noto Sans JP"/>
+                <a:ea typeface="Noto Sans JP"/>
+                <a:cs typeface="Noto Sans JP"/>
+              </a:rPr>
+              <a:t>チェックアウトで預ける</a:t>
+            </a:r>
+          </a:p>
+        </p:txBody>
+      </p:sp>
+      <p:sp>
+        <p:nvSpPr>
+          <p:cNvPr id="10" name="図・ラベル"/>
+          <p:cNvSpPr txBox="1"/>
+          <p:nvPr/>
+        </p:nvSpPr>
+        <p:spPr>
+          <a:xfrm>
+            <a:off x="3937000" y="3634740"/>
+            <a:ext cx="11430000" cy="432816"/>
+          </a:xfrm>
+          <a:prstGeom prst="rect">
+            <a:avLst/>
+          </a:prstGeom>
+          <a:noFill/>
+        </p:spPr>
+        <p:txBody>
+          <a:bodyPr wrap="none" lIns="0" rIns="0" tIns="0" bIns="0" anchor="t"/>
+          <a:lstStyle/>
+          <a:p>
+            <a:pPr algn="ctr">
+              <a:lnSpc>
+                <a:spcPts val="3408"/>
+              </a:lnSpc>
+              <a:spcBef>
+                <a:spcPts val="0"/>
+              </a:spcBef>
+              <a:spcAft>
+                <a:spcPts val="0"/>
+              </a:spcAft>
+            </a:pPr>
+            <a:r>
+              <a:rPr sz="2400" b="0" spc="-24" lang="ja-JP" altLang="en-US">
+                <a:solidFill>
+                  <a:srgbClr val="FFFFFF"/>
+                </a:solidFill>
+                <a:latin typeface="Noto Sans JP Medium"/>
+                <a:ea typeface="Noto Sans JP Medium"/>
+                <a:cs typeface="Noto Sans JP Medium"/>
+              </a:rPr>
+              <a:t>次のホテル</a:t>
+            </a:r>
+          </a:p>
+        </p:txBody>
+      </p:sp>
+      <p:sp>
+        <p:nvSpPr>
+          <p:cNvPr id="11" name="図・ラベル"/>
+          <p:cNvSpPr txBox="1"/>
+          <p:nvPr/>
+        </p:nvSpPr>
+        <p:spPr>
+          <a:xfrm>
+            <a:off x="3937000" y="4583112"/>
+            <a:ext cx="11430000" cy="270510"/>
+          </a:xfrm>
+          <a:prstGeom prst="rect">
+            <a:avLst/>
+          </a:prstGeom>
+          <a:noFill/>
+        </p:spPr>
+        <p:txBody>
+          <a:bodyPr wrap="none" lIns="0" rIns="0" tIns="0" bIns="0" anchor="t"/>
+          <a:lstStyle/>
+          <a:p>
+            <a:pPr algn="ctr">
+              <a:lnSpc>
+                <a:spcPts val="2129"/>
+              </a:lnSpc>
+              <a:spcBef>
+                <a:spcPts val="0"/>
+              </a:spcBef>
+              <a:spcAft>
+                <a:spcPts val="0"/>
+              </a:spcAft>
+            </a:pPr>
+            <a:r>
+              <a:rPr sz="1500" b="0" spc="-15" lang="ja-JP" altLang="en-US">
+                <a:solidFill>
+                  <a:srgbClr val="A3A3A3"/>
+                </a:solidFill>
+                <a:latin typeface="Noto Sans JP"/>
+                <a:ea typeface="Noto Sans JP"/>
+                <a:cs typeface="Noto Sans JP"/>
+              </a:rPr>
+              <a:t>先に届いている</a:t>
+            </a:r>
+          </a:p>
+        </p:txBody>
+      </p:sp>
+      <p:sp>
+        <p:nvSpPr>
+          <p:cNvPr id="12" name="図・ラベル"/>
+          <p:cNvSpPr txBox="1"/>
+          <p:nvPr/>
+        </p:nvSpPr>
+        <p:spPr>
+          <a:xfrm>
+            <a:off x="381000" y="3047048"/>
+            <a:ext cx="11430000" cy="378714"/>
+          </a:xfrm>
+          <a:prstGeom prst="rect">
+            <a:avLst/>
+          </a:prstGeom>
+          <a:noFill/>
+        </p:spPr>
+        <p:txBody>
+          <a:bodyPr wrap="none" lIns="0" rIns="0" tIns="0" bIns="0" anchor="t"/>
+          <a:lstStyle/>
+          <a:p>
+            <a:pPr algn="ctr">
+              <a:lnSpc>
+                <a:spcPts val="2982"/>
+              </a:lnSpc>
+              <a:spcBef>
+                <a:spcPts val="0"/>
+              </a:spcBef>
+              <a:spcAft>
+                <a:spcPts val="0"/>
+              </a:spcAft>
+            </a:pPr>
+            <a:r>
+              <a:rPr sz="2100" b="0" spc="-21" lang="ja-JP" altLang="en-US">
+                <a:solidFill>
+                  <a:srgbClr val="FFFFFF"/>
+                </a:solidFill>
+                <a:latin typeface="Noto Sans JP Medium"/>
+                <a:ea typeface="Noto Sans JP Medium"/>
+                <a:cs typeface="Noto Sans JP Medium"/>
+              </a:rPr>
+              <a:t>人は、身軽に観光へ。</a:t>
+            </a:r>
+          </a:p>
+        </p:txBody>
+      </p:sp>
+      <p:sp>
+        <p:nvSpPr>
+          <p:cNvPr id="13" name="図・ラベル"/>
+          <p:cNvSpPr txBox="1"/>
+          <p:nvPr/>
+        </p:nvSpPr>
+        <p:spPr>
+          <a:xfrm>
+            <a:off x="381000" y="5326698"/>
+            <a:ext cx="11430000" cy="378714"/>
+          </a:xfrm>
+          <a:prstGeom prst="rect">
+            <a:avLst/>
+          </a:prstGeom>
+          <a:noFill/>
+        </p:spPr>
+        <p:txBody>
+          <a:bodyPr wrap="none" lIns="0" rIns="0" tIns="0" bIns="0" anchor="t"/>
+          <a:lstStyle/>
+          <a:p>
+            <a:pPr algn="ctr">
+              <a:lnSpc>
+                <a:spcPts val="2982"/>
+              </a:lnSpc>
+              <a:spcBef>
+                <a:spcPts val="0"/>
+              </a:spcBef>
+              <a:spcAft>
+                <a:spcPts val="0"/>
+              </a:spcAft>
+            </a:pPr>
+            <a:r>
+              <a:rPr sz="2100" b="0" spc="-21" lang="ja-JP" altLang="en-US">
+                <a:solidFill>
+                  <a:srgbClr val="F26A1B"/>
+                </a:solidFill>
+                <a:latin typeface="Noto Sans JP Medium"/>
+                <a:ea typeface="Noto Sans JP Medium"/>
+                <a:cs typeface="Noto Sans JP Medium"/>
+              </a:rPr>
+              <a:t>荷物は、今ある物流で。</a:t>
+            </a:r>
+          </a:p>
+        </p:txBody>
+      </p:sp>
+      <p:sp>
+        <p:nvSpPr>
+          <p:cNvPr id="14" name="図・ラベル"/>
+          <p:cNvSpPr txBox="1"/>
+          <p:nvPr/>
+        </p:nvSpPr>
+        <p:spPr>
+          <a:xfrm>
+            <a:off x="381000" y="5776912"/>
+            <a:ext cx="11430000" cy="270510"/>
+          </a:xfrm>
+          <a:prstGeom prst="rect">
+            <a:avLst/>
+          </a:prstGeom>
+          <a:noFill/>
+        </p:spPr>
+        <p:txBody>
+          <a:bodyPr wrap="none" lIns="0" rIns="0" tIns="0" bIns="0" anchor="t"/>
+          <a:lstStyle/>
+          <a:p>
+            <a:pPr algn="ctr">
+              <a:lnSpc>
+                <a:spcPts val="2129"/>
+              </a:lnSpc>
+              <a:spcBef>
+                <a:spcPts val="0"/>
+              </a:spcBef>
+              <a:spcAft>
+                <a:spcPts val="0"/>
+              </a:spcAft>
+            </a:pPr>
+            <a:r>
+              <a:rPr sz="1500" b="0" spc="-15" lang="ja-JP" altLang="en-US">
+                <a:solidFill>
+                  <a:srgbClr val="A3A3A3"/>
+                </a:solidFill>
+                <a:latin typeface="Noto Sans JP"/>
+                <a:ea typeface="Noto Sans JP"/>
+                <a:cs typeface="Noto Sans JP"/>
+              </a:rPr>
+              <a:t>旅行会社・DMCからの依頼を受けて、BondExが手配します</a:t>
+            </a:r>
+          </a:p>
+        </p:txBody>
+      </p:sp>
+      <p:sp>
+        <p:nvSpPr>
+          <p:cNvPr id="15" name="見出し"/>
+          <p:cNvSpPr txBox="1"/>
+          <p:nvPr/>
+        </p:nvSpPr>
+        <p:spPr>
+          <a:xfrm>
+            <a:off x="812800" y="692785"/>
+            <a:ext cx="6583759" cy="1658938"/>
+          </a:xfrm>
+          <a:prstGeom prst="rect">
+            <a:avLst/>
+          </a:prstGeom>
+          <a:noFill/>
+        </p:spPr>
+        <p:txBody>
+          <a:bodyPr wrap="none" lIns="0" rIns="0" tIns="0" bIns="0" anchor="t"/>
+          <a:lstStyle/>
+          <a:p>
+            <a:pPr algn="l">
+              <a:lnSpc>
+                <a:spcPts val="6531"/>
+              </a:lnSpc>
+              <a:spcBef>
+                <a:spcPts val="0"/>
+              </a:spcBef>
+              <a:spcAft>
+                <a:spcPts val="0"/>
+              </a:spcAft>
+            </a:pPr>
+            <a:r>
+              <a:rPr sz="4600" b="0" spc="-46" lang="ja-JP" altLang="en-US">
                 <a:solidFill>
                   <a:srgbClr val="FFFFFF"/>
                 </a:solidFill>
@@ -5042,7 +5903,7 @@
           <a:p>
             <a:pPr algn="l">
               <a:lnSpc>
-                <a:spcPts val="7100"/>
+                <a:spcPts val="6531"/>
               </a:lnSpc>
               <a:spcBef>
                 <a:spcPts val="0"/>
@@ -5052,7 +5913,7 @@
               </a:spcAft>
             </a:pPr>
             <a:r>
-              <a:rPr sz="5000" b="0" spc="-50" lang="ja-JP" altLang="en-US">
+              <a:rPr sz="4600" b="0" spc="-46" lang="ja-JP" altLang="en-US">
                 <a:solidFill>
                   <a:srgbClr val="FFFFFF"/>
                 </a:solidFill>

--- a/docs/collateral/seminar-luggage/out/BondEx_Seminar_Draft.pptx
+++ b/docs/collateral/seminar-luggage/out/BondEx_Seminar_Draft.pptx
@@ -4429,7 +4429,7 @@
       <p:grpSpPr/>
       <p:pic>
         <p:nvPicPr>
-          <p:cNvPr id="2" name="写真（右クリック→図の変更で差し替え）" descr="s01.png"/>
+          <p:cNvPr id="2" name="写真（右クリック→図の変更で差し替え）" descr="s01.jpg"/>
           <p:cNvPicPr>
             <a:picLocks noChangeAspect="1"/>
           </p:cNvPicPr>
@@ -4611,7 +4611,7 @@
       <p:grpSpPr/>
       <p:pic>
         <p:nvPicPr>
-          <p:cNvPr id="2" name="写真・左（図の変更で差し替え）" descr="s02a.png"/>
+          <p:cNvPr id="2" name="写真（右クリック→図の変更で差し替え）" descr="s02.jpg"/>
           <p:cNvPicPr>
             <a:picLocks noChangeAspect="1"/>
           </p:cNvPicPr>
@@ -4627,38 +4627,64 @@
         <p:spPr>
           <a:xfrm>
             <a:off x="0" y="0"/>
-            <a:ext cx="6070600" cy="4064000"/>
+            <a:ext cx="12192000" cy="6858000"/>
           </a:xfrm>
           <a:prstGeom prst="rect">
             <a:avLst/>
           </a:prstGeom>
         </p:spPr>
       </p:pic>
-      <p:pic>
-        <p:nvPicPr>
-          <p:cNvPr id="3" name="写真・右（図の変更で差し替え）" descr="s02b.png"/>
-          <p:cNvPicPr>
-            <a:picLocks noChangeAspect="1"/>
-          </p:cNvPicPr>
+      <p:sp>
+        <p:nvSpPr>
+          <p:cNvPr id="3" name="Scrim（写真の上の黒グラデーション）"/>
+          <p:cNvSpPr/>
           <p:nvPr/>
-        </p:nvPicPr>
-        <p:blipFill>
-          <a:blip r:embed="rId3"/>
-          <a:srcRect/>
-          <a:stretch>
-            <a:fillRect/>
-          </a:stretch>
-        </p:blipFill>
+        </p:nvSpPr>
         <p:spPr>
           <a:xfrm>
-            <a:off x="6121400" y="0"/>
-            <a:ext cx="6070600" cy="4064000"/>
+            <a:off x="0" y="0"/>
+            <a:ext cx="12192000" cy="6858000"/>
           </a:xfrm>
           <a:prstGeom prst="rect">
             <a:avLst/>
           </a:prstGeom>
+          <a:gradFill rotWithShape="1">
+            <a:gsLst>
+              <a:gs pos="0">
+                <a:srgbClr val="000000">
+                  <a:alpha val="0"/>
+                </a:srgbClr>
+              </a:gs>
+              <a:gs pos="36000">
+                <a:srgbClr val="000000">
+                  <a:alpha val="0"/>
+                </a:srgbClr>
+              </a:gs>
+              <a:gs pos="60000">
+                <a:srgbClr val="000000">
+                  <a:alpha val="42000"/>
+                </a:srgbClr>
+              </a:gs>
+              <a:gs pos="100000">
+                <a:srgbClr val="000000">
+                  <a:alpha val="84000"/>
+                </a:srgbClr>
+              </a:gs>
+            </a:gsLst>
+            <a:lin ang="5400000" scaled="0"/>
+          </a:gradFill>
+          <a:ln>
+            <a:noFill/>
+          </a:ln>
         </p:spPr>
-      </p:pic>
+        <p:txBody>
+          <a:bodyPr rtlCol="0" anchor="ctr"/>
+          <a:lstStyle/>
+          <a:p>
+            <a:pPr algn="ctr"/>
+          </a:p>
+        </p:txBody>
+      </p:sp>
       <p:sp>
         <p:nvSpPr>
           <p:cNvPr id="4" name="見出し"/>
@@ -4756,7 +4782,7 @@
       <p:grpSpPr/>
       <p:pic>
         <p:nvPicPr>
-          <p:cNvPr id="2" name="写真（右クリック→図の変更で差し替え）" descr="s03.png"/>
+          <p:cNvPr id="2" name="写真（右クリック→図の変更で差し替え）" descr="s03.jpg"/>
           <p:cNvPicPr>
             <a:picLocks noChangeAspect="1"/>
           </p:cNvPicPr>
@@ -5954,7 +5980,7 @@
       <p:grpSpPr/>
       <p:pic>
         <p:nvPicPr>
-          <p:cNvPr id="2" name="写真（右クリック→図の変更で差し替え）" descr="s05.png"/>
+          <p:cNvPr id="2" name="写真（右クリック→図の変更で差し替え）" descr="s05.jpg"/>
           <p:cNvPicPr>
             <a:picLocks noChangeAspect="1"/>
           </p:cNvPicPr>
@@ -6421,7 +6447,7 @@
       <p:grpSpPr/>
       <p:pic>
         <p:nvPicPr>
-          <p:cNvPr id="2" name="写真（右クリック→図の変更で差し替え）" descr="s07.png"/>
+          <p:cNvPr id="2" name="写真（右クリック→図の変更で差し替え）" descr="s07.jpg"/>
           <p:cNvPicPr>
             <a:picLocks noChangeAspect="1"/>
           </p:cNvPicPr>
@@ -6592,7 +6618,7 @@
       <p:grpSpPr/>
       <p:pic>
         <p:nvPicPr>
-          <p:cNvPr id="2" name="写真（右クリック→図の変更で差し替え）" descr="s08.png"/>
+          <p:cNvPr id="2" name="写真（右クリック→図の変更で差し替え）" descr="s08.jpg"/>
           <p:cNvPicPr>
             <a:picLocks noChangeAspect="1"/>
           </p:cNvPicPr>

--- a/docs/collateral/seminar-luggage/out/BondEx_Seminar_Draft.pptx
+++ b/docs/collateral/seminar-luggage/out/BondEx_Seminar_Draft.pptx
@@ -4790,7 +4790,7 @@
         </p:nvPicPr>
         <p:blipFill>
           <a:blip r:embed="rId2"/>
-          <a:srcRect/>
+          <a:srcRect t="32" b="21"/>
           <a:stretch>
             <a:fillRect/>
           </a:stretch>
@@ -5988,7 +5988,7 @@
         </p:nvPicPr>
         <p:blipFill>
           <a:blip r:embed="rId2"/>
-          <a:srcRect/>
+          <a:srcRect t="27" b="27"/>
           <a:stretch>
             <a:fillRect/>
           </a:stretch>
@@ -6149,9 +6149,36 @@
         <p:nvPr/>
       </p:nvGrpSpPr>
       <p:grpSpPr/>
-      <p:sp>
-        <p:nvSpPr>
-          <p:cNvPr id="2" name="数字の前後"/>
+      <p:pic>
+        <p:nvPicPr>
+          <p:cNvPr id="2" name="背景写真（任意）" descr="s06.jpg"/>
+          <p:cNvPicPr>
+            <a:picLocks noChangeAspect="1"/>
+          </p:cNvPicPr>
+          <p:nvPr/>
+        </p:nvPicPr>
+        <p:blipFill>
+          <a:blip r:embed="rId2">
+            <a:alphaModFix amt="22000"/>
+          </a:blip>
+          <a:srcRect t="27" b="27"/>
+          <a:stretch>
+            <a:fillRect/>
+          </a:stretch>
+        </p:blipFill>
+        <p:spPr>
+          <a:xfrm>
+            <a:off x="0" y="0"/>
+            <a:ext cx="12192000" cy="6858000"/>
+          </a:xfrm>
+          <a:prstGeom prst="rect">
+            <a:avLst/>
+          </a:prstGeom>
+        </p:spPr>
+      </p:pic>
+      <p:sp>
+        <p:nvSpPr>
+          <p:cNvPr id="3" name="数字の前後"/>
           <p:cNvSpPr txBox="1"/>
           <p:nvPr/>
         </p:nvSpPr>
@@ -6196,7 +6223,7 @@
       </p:sp>
       <p:sp>
         <p:nvSpPr>
-          <p:cNvPr id="3" name="数字の前後"/>
+          <p:cNvPr id="4" name="数字の前後"/>
           <p:cNvSpPr txBox="1"/>
           <p:nvPr/>
         </p:nvSpPr>
@@ -6241,7 +6268,7 @@
       </p:sp>
       <p:sp>
         <p:nvSpPr>
-          <p:cNvPr id="4" name="数字"/>
+          <p:cNvPr id="5" name="数字"/>
           <p:cNvSpPr txBox="1"/>
           <p:nvPr/>
         </p:nvSpPr>
@@ -6286,7 +6313,7 @@
       </p:sp>
       <p:sp>
         <p:nvSpPr>
-          <p:cNvPr id="5" name="数字"/>
+          <p:cNvPr id="6" name="数字"/>
           <p:cNvSpPr txBox="1"/>
           <p:nvPr/>
         </p:nvSpPr>
@@ -6331,7 +6358,7 @@
       </p:sp>
       <p:sp>
         <p:nvSpPr>
-          <p:cNvPr id="6" name="数字"/>
+          <p:cNvPr id="7" name="数字"/>
           <p:cNvSpPr txBox="1"/>
           <p:nvPr/>
         </p:nvSpPr>
@@ -6376,7 +6403,7 @@
       </p:sp>
       <p:sp>
         <p:nvSpPr>
-          <p:cNvPr id="7" name="注記"/>
+          <p:cNvPr id="8" name="注記"/>
           <p:cNvSpPr txBox="1"/>
           <p:nvPr/>
         </p:nvSpPr>
@@ -6455,7 +6482,7 @@
         </p:nvPicPr>
         <p:blipFill>
           <a:blip r:embed="rId2"/>
-          <a:srcRect/>
+          <a:srcRect t="27" b="27"/>
           <a:stretch>
             <a:fillRect/>
           </a:stretch>
@@ -6626,7 +6653,7 @@
         </p:nvPicPr>
         <p:blipFill>
           <a:blip r:embed="rId2"/>
-          <a:srcRect/>
+          <a:srcRect t="21" b="32"/>
           <a:stretch>
             <a:fillRect/>
           </a:stretch>
